--- a/заняття_21/OOP_2.pptx
+++ b/заняття_21/OOP_2.pptx
@@ -2003,7 +2003,7 @@
               <a:buNone/>
             </a:pPr>
             <a:r>
-              <a:rPr lang="en-US" sz="1500" dirty="0">
+              <a:rPr lang="en-US" sz="1600" dirty="0">
                 <a:solidFill>
                   <a:srgbClr val="3C4570"/>
                 </a:solidFill>
@@ -2013,7 +2013,7 @@
               </a:rPr>
               <a:t>Наслідування + інкапсуляція + поліморфізм</a:t>
             </a:r>
-            <a:endParaRPr lang="en-US" sz="1500" dirty="0"/>
+            <a:endParaRPr lang="en-US" sz="1600" dirty="0"/>
           </a:p>
         </p:txBody>
       </p:sp>
@@ -2395,7 +2395,7 @@
               <a:buNone/>
             </a:pPr>
             <a:r>
-              <a:rPr lang="en-US" sz="1250" dirty="0">
+              <a:rPr lang="en-US" sz="1600" dirty="0">
                 <a:solidFill>
                   <a:srgbClr val="232B5C"/>
                 </a:solidFill>
@@ -2405,7 +2405,7 @@
               </a:rPr>
               <a:t>1. super().__init__(name) — Student переймає ім'я в Person, не дублюючи код.</a:t>
             </a:r>
-            <a:endParaRPr lang="en-US" sz="1250" dirty="0"/>
+            <a:endParaRPr lang="en-US" sz="1600" dirty="0"/>
           </a:p>
           <a:p>
             <a:pPr marL="0" indent="0">
@@ -2418,7 +2418,7 @@
               <a:buNone/>
             </a:pPr>
             <a:r>
-              <a:rPr lang="en-US" sz="1250" dirty="0">
+              <a:rPr lang="en-US" sz="1600" dirty="0">
                 <a:solidFill>
                   <a:srgbClr val="232B5C"/>
                 </a:solidFill>
@@ -2428,7 +2428,7 @@
               </a:rPr>
               <a:t>2. self.__grade — оцінка прихована від прямого доступу ззовні (інкапсуляція).</a:t>
             </a:r>
-            <a:endParaRPr lang="en-US" sz="1250" dirty="0"/>
+            <a:endParaRPr lang="en-US" sz="1600" dirty="0"/>
           </a:p>
           <a:p>
             <a:pPr marL="0" indent="0">
@@ -2441,7 +2441,7 @@
               <a:buNone/>
             </a:pPr>
             <a:r>
-              <a:rPr lang="en-US" sz="1250" dirty="0">
+              <a:rPr lang="en-US" sz="1600" dirty="0">
                 <a:solidFill>
                   <a:srgbClr val="232B5C"/>
                 </a:solidFill>
@@ -2451,7 +2451,7 @@
               </a:rPr>
               <a:t>3. describe() у Student перекриває версію з Person (поліморфізм).</a:t>
             </a:r>
-            <a:endParaRPr lang="en-US" sz="1250" dirty="0"/>
+            <a:endParaRPr lang="en-US" sz="1600" dirty="0"/>
           </a:p>
           <a:p>
             <a:pPr marL="0" indent="0">
@@ -2464,7 +2464,7 @@
               <a:buNone/>
             </a:pPr>
             <a:r>
-              <a:rPr lang="en-US" sz="1250" dirty="0">
+              <a:rPr lang="en-US" sz="1600" dirty="0">
                 <a:solidFill>
                   <a:srgbClr val="232B5C"/>
                 </a:solidFill>
@@ -2474,7 +2474,7 @@
               </a:rPr>
               <a:t>4. s.describe() поверне текст саме версії Student, з оцінкою.</a:t>
             </a:r>
-            <a:endParaRPr lang="en-US" sz="1250" dirty="0"/>
+            <a:endParaRPr lang="en-US" sz="1600" dirty="0"/>
           </a:p>
         </p:txBody>
       </p:sp>
@@ -4936,11 +4936,10 @@
           <a:bodyPr wrap="square" lIns="0" tIns="0" rIns="0" bIns="0" rtlCol="0" anchor="t"/>
           <a:lstStyle/>
           <a:p>
-            <a:pPr marL="0" indent="0">
+            <a:pPr>
               <a:lnSpc>
                 <a:spcPct val="115000"/>
               </a:lnSpc>
-              <a:buNone/>
             </a:pPr>
             <a:r>
               <a:rPr lang="en-US" sz="1250" dirty="0">
@@ -4951,7 +4950,29 @@
                 <a:ea typeface="Courier New" pitchFamily="34" charset="-122"/>
                 <a:cs typeface="Courier New" pitchFamily="34" charset="-120"/>
               </a:rPr>
-              <a:t>t = Teacher("Ірина")</a:t>
+              <a:t>t = Teacher("</a:t>
+            </a:r>
+            <a:r>
+              <a:rPr lang="uk-UA" sz="1250" dirty="0">
+                <a:solidFill>
+                  <a:srgbClr val="CADCFC"/>
+                </a:solidFill>
+                <a:latin typeface="Courier New" pitchFamily="34" charset="0"/>
+                <a:ea typeface="Courier New" pitchFamily="34" charset="-122"/>
+                <a:cs typeface="Courier New" pitchFamily="34" charset="-120"/>
+              </a:rPr>
+              <a:t>Ольга</a:t>
+            </a:r>
+            <a:r>
+              <a:rPr lang="en-US" sz="1250" dirty="0">
+                <a:solidFill>
+                  <a:srgbClr val="CADCFC"/>
+                </a:solidFill>
+                <a:latin typeface="Courier New" pitchFamily="34" charset="0"/>
+                <a:ea typeface="Courier New" pitchFamily="34" charset="-122"/>
+                <a:cs typeface="Courier New" pitchFamily="34" charset="-120"/>
+              </a:rPr>
+              <a:t>")</a:t>
             </a:r>
             <a:endParaRPr lang="en-US" sz="1250" dirty="0"/>
           </a:p>
@@ -5342,11 +5363,10 @@
             <a:endParaRPr lang="en-US" sz="1250" dirty="0"/>
           </a:p>
           <a:p>
-            <a:pPr marL="0" indent="0">
+            <a:pPr>
               <a:lnSpc>
                 <a:spcPct val="115000"/>
               </a:lnSpc>
-              <a:buNone/>
             </a:pPr>
             <a:r>
               <a:rPr lang="en-US" sz="1250" dirty="0">
@@ -5357,7 +5377,29 @@
                 <a:ea typeface="Courier New" pitchFamily="34" charset="-122"/>
                 <a:cs typeface="Courier New" pitchFamily="34" charset="-120"/>
               </a:rPr>
-              <a:t>teacher = Teacher("Ірина Петрівна", "Python")</a:t>
+              <a:t>teacher = Teacher("</a:t>
+            </a:r>
+            <a:r>
+              <a:rPr lang="uk-UA" sz="1250" dirty="0">
+                <a:solidFill>
+                  <a:srgbClr val="CADCFC"/>
+                </a:solidFill>
+                <a:latin typeface="Courier New" pitchFamily="34" charset="0"/>
+                <a:ea typeface="Courier New" pitchFamily="34" charset="-122"/>
+                <a:cs typeface="Courier New" pitchFamily="34" charset="-120"/>
+              </a:rPr>
+              <a:t>Ольга</a:t>
+            </a:r>
+            <a:r>
+              <a:rPr lang="en-US" sz="1250" dirty="0">
+                <a:solidFill>
+                  <a:srgbClr val="CADCFC"/>
+                </a:solidFill>
+                <a:latin typeface="Courier New" pitchFamily="34" charset="0"/>
+                <a:ea typeface="Courier New" pitchFamily="34" charset="-122"/>
+                <a:cs typeface="Courier New" pitchFamily="34" charset="-120"/>
+              </a:rPr>
+              <a:t> Петрівна", "Python")</a:t>
             </a:r>
             <a:endParaRPr lang="en-US" sz="1250" dirty="0"/>
           </a:p>
@@ -5830,7 +5872,7 @@
               <a:buNone/>
             </a:pPr>
             <a:r>
-              <a:rPr lang="en-US" sz="1400" i="1" dirty="0">
+              <a:rPr lang="en-US" sz="1600" i="1" dirty="0">
                 <a:solidFill>
                   <a:srgbClr val="CADCFC"/>
                 </a:solidFill>
@@ -5840,7 +5882,7 @@
               </a:rPr>
               <a:t>Дозволяє викликати методи Person з середини Teacher, не дублюючи код</a:t>
             </a:r>
-            <a:endParaRPr lang="en-US" sz="1400" dirty="0"/>
+            <a:endParaRPr lang="en-US" sz="1600" dirty="0"/>
           </a:p>
         </p:txBody>
       </p:sp>
@@ -5908,7 +5950,7 @@
               <a:buNone/>
             </a:pPr>
             <a:r>
-              <a:rPr lang="en-US" sz="1450" b="1" dirty="0">
+              <a:rPr lang="en-US" sz="1600" b="1" dirty="0">
                 <a:solidFill>
                   <a:srgbClr val="CADCFC"/>
                 </a:solidFill>
@@ -5918,7 +5960,7 @@
               </a:rPr>
               <a:t>class Teacher(Person):</a:t>
             </a:r>
-            <a:endParaRPr lang="en-US" sz="1450" dirty="0"/>
+            <a:endParaRPr lang="en-US" sz="1600" dirty="0"/>
           </a:p>
           <a:p>
             <a:pPr marL="0" indent="0">
@@ -5928,7 +5970,7 @@
               <a:buNone/>
             </a:pPr>
             <a:r>
-              <a:rPr lang="en-US" sz="1450" dirty="0">
+              <a:rPr lang="en-US" sz="1600" dirty="0">
                 <a:solidFill>
                   <a:srgbClr val="CADCFC"/>
                 </a:solidFill>
@@ -5938,7 +5980,7 @@
               </a:rPr>
               <a:t>    def __init__(self, name, subject):</a:t>
             </a:r>
-            <a:endParaRPr lang="en-US" sz="1450" dirty="0"/>
+            <a:endParaRPr lang="en-US" sz="1600" dirty="0"/>
           </a:p>
           <a:p>
             <a:pPr marL="0" indent="0">
@@ -5948,7 +5990,7 @@
               <a:buNone/>
             </a:pPr>
             <a:r>
-              <a:rPr lang="en-US" sz="1450" b="1" dirty="0">
+              <a:rPr lang="en-US" sz="1600" b="1" dirty="0">
                 <a:solidFill>
                   <a:srgbClr val="02C39A"/>
                 </a:solidFill>
@@ -5958,7 +6000,7 @@
               </a:rPr>
               <a:t>        super().__init__(name)</a:t>
             </a:r>
-            <a:endParaRPr lang="en-US" sz="1450" dirty="0"/>
+            <a:endParaRPr lang="en-US" sz="1600" dirty="0"/>
           </a:p>
           <a:p>
             <a:pPr marL="0" indent="0">
@@ -5968,7 +6010,7 @@
               <a:buNone/>
             </a:pPr>
             <a:r>
-              <a:rPr lang="en-US" sz="1450" dirty="0">
+              <a:rPr lang="en-US" sz="1600" dirty="0">
                 <a:solidFill>
                   <a:srgbClr val="CADCFC"/>
                 </a:solidFill>
@@ -5978,7 +6020,7 @@
               </a:rPr>
               <a:t>        self.subject = subject</a:t>
             </a:r>
-            <a:endParaRPr lang="en-US" sz="1450" dirty="0"/>
+            <a:endParaRPr lang="en-US" sz="1600" dirty="0"/>
           </a:p>
         </p:txBody>
       </p:sp>
@@ -6039,7 +6081,7 @@
               <a:buNone/>
             </a:pPr>
             <a:r>
-              <a:rPr lang="en-US" sz="1300" b="1" dirty="0">
+              <a:rPr lang="en-US" sz="1600" b="1" dirty="0">
                 <a:solidFill>
                   <a:srgbClr val="F08A8A"/>
                 </a:solidFill>
@@ -6050,7 +6092,7 @@
               <a:t>Без super().__init__(name)
 </a:t>
             </a:r>
-            <a:endParaRPr lang="en-US" sz="1300" dirty="0"/>
+            <a:endParaRPr lang="en-US" sz="1600" dirty="0"/>
           </a:p>
           <a:p>
             <a:pPr marL="0" indent="0">
@@ -6060,7 +6102,7 @@
               <a:buNone/>
             </a:pPr>
             <a:r>
-              <a:rPr lang="en-US" sz="1300" dirty="0">
+              <a:rPr lang="en-US" sz="1600" dirty="0">
                 <a:solidFill>
                   <a:srgbClr val="CADCFC"/>
                 </a:solidFill>
@@ -6070,7 +6112,7 @@
               </a:rPr>
               <a:t>поле self.name у Teacher взагалі не буде встановлено — довелось би дублювати "self.name = name" ще раз.</a:t>
             </a:r>
-            <a:endParaRPr lang="en-US" sz="1300" dirty="0"/>
+            <a:endParaRPr lang="en-US" sz="1600" dirty="0"/>
           </a:p>
         </p:txBody>
       </p:sp>
@@ -6153,7 +6195,7 @@
               <a:buNone/>
             </a:pPr>
             <a:r>
-              <a:rPr lang="en-US" sz="1250" dirty="0">
+              <a:rPr lang="en-US" sz="1400" dirty="0">
                 <a:solidFill>
                   <a:srgbClr val="CADCFC"/>
                 </a:solidFill>
@@ -6163,7 +6205,7 @@
               </a:rPr>
               <a:t>super() дає доступ саме до батьківського класу — того, що вказаний у дужках Teacher(Person).</a:t>
             </a:r>
-            <a:endParaRPr lang="en-US" sz="1250" dirty="0"/>
+            <a:endParaRPr lang="en-US" sz="1400" dirty="0"/>
           </a:p>
         </p:txBody>
       </p:sp>
@@ -6246,7 +6288,7 @@
               <a:buNone/>
             </a:pPr>
             <a:r>
-              <a:rPr lang="en-US" sz="1250" dirty="0">
+              <a:rPr lang="en-US" sz="1400" dirty="0">
                 <a:solidFill>
                   <a:srgbClr val="CADCFC"/>
                 </a:solidFill>
@@ -6256,7 +6298,7 @@
               </a:rPr>
               <a:t>Логіка ініціалізації Person лишається в одному місці — легше підтримувати код.</a:t>
             </a:r>
-            <a:endParaRPr lang="en-US" sz="1250" dirty="0"/>
+            <a:endParaRPr lang="en-US" sz="1400" dirty="0"/>
           </a:p>
         </p:txBody>
       </p:sp>
@@ -6339,7 +6381,7 @@
               <a:buNone/>
             </a:pPr>
             <a:r>
-              <a:rPr lang="en-US" sz="1250" dirty="0">
+              <a:rPr lang="en-US" sz="1400" dirty="0">
                 <a:solidFill>
                   <a:srgbClr val="CADCFC"/>
                 </a:solidFill>
@@ -6349,7 +6391,7 @@
               </a:rPr>
               <a:t>Після super().__init__(name) можна додавати власні поля нащадка, як self.subject.</a:t>
             </a:r>
-            <a:endParaRPr lang="en-US" sz="1250" dirty="0"/>
+            <a:endParaRPr lang="en-US" sz="1400" dirty="0"/>
           </a:p>
         </p:txBody>
       </p:sp>
@@ -6489,7 +6531,7 @@
               <a:buNone/>
             </a:pPr>
             <a:r>
-              <a:rPr lang="en-US" sz="1500" dirty="0">
+              <a:rPr lang="en-US" sz="1600" dirty="0">
                 <a:solidFill>
                   <a:srgbClr val="3C4570"/>
                 </a:solidFill>
@@ -6499,7 +6541,7 @@
               </a:rPr>
               <a:t>Об'єкт ховає частину своїх даних і показує лише потрібний "інтерфейс"</a:t>
             </a:r>
-            <a:endParaRPr lang="en-US" sz="1500" dirty="0"/>
+            <a:endParaRPr lang="en-US" sz="1600" dirty="0"/>
           </a:p>
         </p:txBody>
       </p:sp>
@@ -6584,7 +6626,7 @@
               <a:buNone/>
             </a:pPr>
             <a:r>
-              <a:rPr lang="en-US" sz="1300" i="1" dirty="0">
+              <a:rPr lang="en-US" i="1" dirty="0">
                 <a:solidFill>
                   <a:srgbClr val="6B78A8"/>
                 </a:solidFill>
@@ -6594,7 +6636,7 @@
               </a:rPr>
               <a:t>Капсула ліків: ви бачите оболонку,</a:t>
             </a:r>
-            <a:endParaRPr lang="en-US" sz="1300" dirty="0"/>
+            <a:endParaRPr lang="en-US" dirty="0"/>
           </a:p>
           <a:p>
             <a:pPr marL="0" indent="0" algn="ctr">
@@ -6604,7 +6646,7 @@
               <a:buNone/>
             </a:pPr>
             <a:r>
-              <a:rPr lang="en-US" sz="1300" i="1" dirty="0">
+              <a:rPr lang="en-US" i="1" dirty="0">
                 <a:solidFill>
                   <a:srgbClr val="6B78A8"/>
                 </a:solidFill>
@@ -6614,7 +6656,7 @@
               </a:rPr>
               <a:t>а не сам порошок усередині</a:t>
             </a:r>
-            <a:endParaRPr lang="en-US" sz="1300" dirty="0"/>
+            <a:endParaRPr lang="en-US" dirty="0"/>
           </a:p>
         </p:txBody>
       </p:sp>
@@ -6753,7 +6795,7 @@
               <a:buNone/>
             </a:pPr>
             <a:r>
-              <a:rPr lang="en-US" sz="1200" dirty="0">
+              <a:rPr lang="en-US" sz="1400" dirty="0">
                 <a:solidFill>
                   <a:srgbClr val="CADCFC"/>
                 </a:solidFill>
@@ -6763,7 +6805,7 @@
               </a:rPr>
               <a:t>відкрите поле — доступне звідусіль</a:t>
             </a:r>
-            <a:endParaRPr lang="en-US" sz="1200" dirty="0"/>
+            <a:endParaRPr lang="en-US" sz="1400" dirty="0"/>
           </a:p>
         </p:txBody>
       </p:sp>
@@ -6902,7 +6944,7 @@
               <a:buNone/>
             </a:pPr>
             <a:r>
-              <a:rPr lang="en-US" sz="1200" dirty="0">
+              <a:rPr lang="en-US" sz="1400" dirty="0">
                 <a:solidFill>
                   <a:srgbClr val="CADCFC"/>
                 </a:solidFill>
@@ -6912,7 +6954,7 @@
               </a:rPr>
               <a:t>домовленість "не чіпай ззовні без потреби"</a:t>
             </a:r>
-            <a:endParaRPr lang="en-US" sz="1200" dirty="0"/>
+            <a:endParaRPr lang="en-US" sz="1400" dirty="0"/>
           </a:p>
         </p:txBody>
       </p:sp>
@@ -7051,7 +7093,7 @@
               <a:buNone/>
             </a:pPr>
             <a:r>
-              <a:rPr lang="en-US" sz="1200" dirty="0">
+              <a:rPr lang="en-US" sz="1400" dirty="0">
                 <a:solidFill>
                   <a:srgbClr val="CADCFC"/>
                 </a:solidFill>
@@ -7061,7 +7103,7 @@
               </a:rPr>
               <a:t>Python "ускладнює" прямий доступ (name mangling)</a:t>
             </a:r>
-            <a:endParaRPr lang="en-US" sz="1200" dirty="0"/>
+            <a:endParaRPr lang="en-US" sz="1400" dirty="0"/>
           </a:p>
         </p:txBody>
       </p:sp>
@@ -7201,7 +7243,7 @@
               <a:buNone/>
             </a:pPr>
             <a:r>
-              <a:rPr lang="en-US" sz="1400" i="1" dirty="0">
+              <a:rPr lang="en-US" sz="1600" i="1" dirty="0">
                 <a:solidFill>
                   <a:srgbClr val="CADCFC"/>
                 </a:solidFill>
@@ -7211,7 +7253,7 @@
               </a:rPr>
               <a:t>Контрольований доступ через методи захищає об'єкт від некоректного стану</a:t>
             </a:r>
-            <a:endParaRPr lang="en-US" sz="1400" dirty="0"/>
+            <a:endParaRPr lang="en-US" sz="1600" dirty="0"/>
           </a:p>
         </p:txBody>
       </p:sp>
@@ -7279,7 +7321,7 @@
               <a:buNone/>
             </a:pPr>
             <a:r>
-              <a:rPr lang="en-US" sz="1250" b="1" dirty="0">
+              <a:rPr lang="en-US" sz="1400" b="1" dirty="0">
                 <a:solidFill>
                   <a:srgbClr val="CADCFC"/>
                 </a:solidFill>
@@ -7289,7 +7331,7 @@
               </a:rPr>
               <a:t>class BankAccount:</a:t>
             </a:r>
-            <a:endParaRPr lang="en-US" sz="1250" dirty="0"/>
+            <a:endParaRPr lang="en-US" sz="1400" dirty="0"/>
           </a:p>
           <a:p>
             <a:pPr marL="0" indent="0">
@@ -7299,7 +7341,7 @@
               <a:buNone/>
             </a:pPr>
             <a:r>
-              <a:rPr lang="en-US" sz="1250" dirty="0">
+              <a:rPr lang="en-US" sz="1400" dirty="0">
                 <a:solidFill>
                   <a:srgbClr val="CADCFC"/>
                 </a:solidFill>
@@ -7309,7 +7351,7 @@
               </a:rPr>
               <a:t>    def __init__(self, owner, balance):</a:t>
             </a:r>
-            <a:endParaRPr lang="en-US" sz="1250" dirty="0"/>
+            <a:endParaRPr lang="en-US" sz="1400" dirty="0"/>
           </a:p>
           <a:p>
             <a:pPr marL="0" indent="0">
@@ -7319,7 +7361,7 @@
               <a:buNone/>
             </a:pPr>
             <a:r>
-              <a:rPr lang="en-US" sz="1250" dirty="0">
+              <a:rPr lang="en-US" sz="1400" dirty="0">
                 <a:solidFill>
                   <a:srgbClr val="CADCFC"/>
                 </a:solidFill>
@@ -7329,7 +7371,7 @@
               </a:rPr>
               <a:t>        self.owner = owner</a:t>
             </a:r>
-            <a:endParaRPr lang="en-US" sz="1250" dirty="0"/>
+            <a:endParaRPr lang="en-US" sz="1400" dirty="0"/>
           </a:p>
           <a:p>
             <a:pPr marL="0" indent="0">
@@ -7339,7 +7381,7 @@
               <a:buNone/>
             </a:pPr>
             <a:r>
-              <a:rPr lang="en-US" sz="1250" b="1" dirty="0">
+              <a:rPr lang="en-US" sz="1400" b="1" dirty="0">
                 <a:solidFill>
                   <a:srgbClr val="02C39A"/>
                 </a:solidFill>
@@ -7349,7 +7391,7 @@
               </a:rPr>
               <a:t>        self.__balance = balance   # приховане поле</a:t>
             </a:r>
-            <a:endParaRPr lang="en-US" sz="1250" dirty="0"/>
+            <a:endParaRPr lang="en-US" sz="1400" dirty="0"/>
           </a:p>
           <a:p>
             <a:pPr marL="0" indent="0">
@@ -7358,7 +7400,7 @@
               </a:lnSpc>
               <a:buNone/>
             </a:pPr>
-            <a:endParaRPr lang="en-US" sz="1250" dirty="0"/>
+            <a:endParaRPr lang="en-US" sz="1400" dirty="0"/>
           </a:p>
           <a:p>
             <a:pPr marL="0" indent="0">
@@ -7368,7 +7410,7 @@
               <a:buNone/>
             </a:pPr>
             <a:r>
-              <a:rPr lang="en-US" sz="1250" dirty="0">
+              <a:rPr lang="en-US" sz="1400" dirty="0">
                 <a:solidFill>
                   <a:srgbClr val="CADCFC"/>
                 </a:solidFill>
@@ -7378,7 +7420,7 @@
               </a:rPr>
               <a:t>    def get_balance(self):</a:t>
             </a:r>
-            <a:endParaRPr lang="en-US" sz="1250" dirty="0"/>
+            <a:endParaRPr lang="en-US" sz="1400" dirty="0"/>
           </a:p>
           <a:p>
             <a:pPr marL="0" indent="0">
@@ -7388,7 +7430,7 @@
               <a:buNone/>
             </a:pPr>
             <a:r>
-              <a:rPr lang="en-US" sz="1250" dirty="0">
+              <a:rPr lang="en-US" sz="1400" dirty="0">
                 <a:solidFill>
                   <a:srgbClr val="02C39A"/>
                 </a:solidFill>
@@ -7398,7 +7440,7 @@
               </a:rPr>
               <a:t>        return self.__balance</a:t>
             </a:r>
-            <a:endParaRPr lang="en-US" sz="1250" dirty="0"/>
+            <a:endParaRPr lang="en-US" sz="1400" dirty="0"/>
           </a:p>
           <a:p>
             <a:pPr marL="0" indent="0">
@@ -7407,7 +7449,7 @@
               </a:lnSpc>
               <a:buNone/>
             </a:pPr>
-            <a:endParaRPr lang="en-US" sz="1250" dirty="0"/>
+            <a:endParaRPr lang="en-US" sz="1400" dirty="0"/>
           </a:p>
           <a:p>
             <a:pPr marL="0" indent="0">
@@ -7417,7 +7459,7 @@
               <a:buNone/>
             </a:pPr>
             <a:r>
-              <a:rPr lang="en-US" sz="1250" dirty="0">
+              <a:rPr lang="en-US" sz="1400" dirty="0">
                 <a:solidFill>
                   <a:srgbClr val="CADCFC"/>
                 </a:solidFill>
@@ -7427,7 +7469,7 @@
               </a:rPr>
               <a:t>    def deposit(self, amount):</a:t>
             </a:r>
-            <a:endParaRPr lang="en-US" sz="1250" dirty="0"/>
+            <a:endParaRPr lang="en-US" sz="1400" dirty="0"/>
           </a:p>
           <a:p>
             <a:pPr marL="0" indent="0">
@@ -7437,7 +7479,7 @@
               <a:buNone/>
             </a:pPr>
             <a:r>
-              <a:rPr lang="en-US" sz="1250" b="1" dirty="0">
+              <a:rPr lang="en-US" sz="1400" b="1" dirty="0">
                 <a:solidFill>
                   <a:srgbClr val="02C39A"/>
                 </a:solidFill>
@@ -7447,7 +7489,7 @@
               </a:rPr>
               <a:t>        if amount &gt; 0:               # перевірка!</a:t>
             </a:r>
-            <a:endParaRPr lang="en-US" sz="1250" dirty="0"/>
+            <a:endParaRPr lang="en-US" sz="1400" dirty="0"/>
           </a:p>
           <a:p>
             <a:pPr marL="0" indent="0">
@@ -7457,7 +7499,7 @@
               <a:buNone/>
             </a:pPr>
             <a:r>
-              <a:rPr lang="en-US" sz="1250" dirty="0">
+              <a:rPr lang="en-US" sz="1400" dirty="0">
                 <a:solidFill>
                   <a:srgbClr val="02C39A"/>
                 </a:solidFill>
@@ -7467,7 +7509,7 @@
               </a:rPr>
               <a:t>            self.__balance += amount</a:t>
             </a:r>
-            <a:endParaRPr lang="en-US" sz="1250" dirty="0"/>
+            <a:endParaRPr lang="en-US" sz="1400" dirty="0"/>
           </a:p>
         </p:txBody>
       </p:sp>
@@ -7550,7 +7592,7 @@
               <a:buNone/>
             </a:pPr>
             <a:r>
-              <a:rPr lang="en-US" sz="1250" dirty="0">
+              <a:rPr lang="en-US" sz="1400" dirty="0">
                 <a:solidFill>
                   <a:srgbClr val="CADCFC"/>
                 </a:solidFill>
@@ -7560,7 +7602,7 @@
               </a:rPr>
               <a:t>account.get_balance() — безпечний, контрольований спосіб дізнатись баланс.</a:t>
             </a:r>
-            <a:endParaRPr lang="en-US" sz="1250" dirty="0"/>
+            <a:endParaRPr lang="en-US" sz="1400" dirty="0"/>
           </a:p>
         </p:txBody>
       </p:sp>
@@ -7643,7 +7685,7 @@
               <a:buNone/>
             </a:pPr>
             <a:r>
-              <a:rPr lang="en-US" sz="1250" dirty="0">
+              <a:rPr lang="en-US" sz="1400" dirty="0">
                 <a:solidFill>
                   <a:srgbClr val="CADCFC"/>
                 </a:solidFill>
@@ -7653,7 +7695,7 @@
               </a:rPr>
               <a:t>deposit() перевіряє amount &gt; 0 — не дає зіпсувати баланс некоректним значенням.</a:t>
             </a:r>
-            <a:endParaRPr lang="en-US" sz="1250" dirty="0"/>
+            <a:endParaRPr lang="en-US" sz="1400" dirty="0"/>
           </a:p>
         </p:txBody>
       </p:sp>
@@ -7736,7 +7778,7 @@
               <a:buNone/>
             </a:pPr>
             <a:r>
-              <a:rPr lang="en-US" sz="1250" dirty="0">
+              <a:rPr lang="en-US" sz="1400" dirty="0">
                 <a:solidFill>
                   <a:srgbClr val="CADCFC"/>
                 </a:solidFill>
@@ -7746,7 +7788,7 @@
               </a:rPr>
               <a:t>Без __balance будь-хто міг би написати account.balance = -500 напряму.</a:t>
             </a:r>
-            <a:endParaRPr lang="en-US" sz="1250" dirty="0"/>
+            <a:endParaRPr lang="en-US" sz="1400" dirty="0"/>
           </a:p>
         </p:txBody>
       </p:sp>
@@ -7886,7 +7928,7 @@
               <a:buNone/>
             </a:pPr>
             <a:r>
-              <a:rPr lang="en-US" sz="1500" dirty="0">
+              <a:rPr lang="en-US" sz="1600" dirty="0">
                 <a:solidFill>
                   <a:srgbClr val="3C4570"/>
                 </a:solidFill>
@@ -7896,7 +7938,7 @@
               </a:rPr>
               <a:t>Один і той самий виклик методу — різна поведінка залежно від об'єкта</a:t>
             </a:r>
-            <a:endParaRPr lang="en-US" sz="1500" dirty="0"/>
+            <a:endParaRPr lang="en-US" sz="1600" dirty="0"/>
           </a:p>
         </p:txBody>
       </p:sp>
@@ -7964,7 +8006,7 @@
               <a:buNone/>
             </a:pPr>
             <a:r>
-              <a:rPr lang="en-US" sz="1300" b="1" dirty="0">
+              <a:rPr lang="en-US" sz="1400" b="1" dirty="0">
                 <a:solidFill>
                   <a:srgbClr val="CADCFC"/>
                 </a:solidFill>
@@ -7974,7 +8016,7 @@
               </a:rPr>
               <a:t>class Dog:</a:t>
             </a:r>
-            <a:endParaRPr lang="en-US" sz="1300" dirty="0"/>
+            <a:endParaRPr lang="en-US" sz="1400" dirty="0"/>
           </a:p>
           <a:p>
             <a:pPr marL="0" indent="0">
@@ -7984,7 +8026,7 @@
               <a:buNone/>
             </a:pPr>
             <a:r>
-              <a:rPr lang="en-US" sz="1300" dirty="0">
+              <a:rPr lang="en-US" sz="1400" dirty="0">
                 <a:solidFill>
                   <a:srgbClr val="CADCFC"/>
                 </a:solidFill>
@@ -7994,7 +8036,7 @@
               </a:rPr>
               <a:t>    def speak(self):</a:t>
             </a:r>
-            <a:endParaRPr lang="en-US" sz="1300" dirty="0"/>
+            <a:endParaRPr lang="en-US" sz="1400" dirty="0"/>
           </a:p>
           <a:p>
             <a:pPr marL="0" indent="0">
@@ -8004,7 +8046,7 @@
               <a:buNone/>
             </a:pPr>
             <a:r>
-              <a:rPr lang="en-US" sz="1300" dirty="0">
+              <a:rPr lang="en-US" sz="1400" dirty="0">
                 <a:solidFill>
                   <a:srgbClr val="02C39A"/>
                 </a:solidFill>
@@ -8014,7 +8056,7 @@
               </a:rPr>
               <a:t>        return "Гав!"</a:t>
             </a:r>
-            <a:endParaRPr lang="en-US" sz="1300" dirty="0"/>
+            <a:endParaRPr lang="en-US" sz="1400" dirty="0"/>
           </a:p>
           <a:p>
             <a:pPr marL="0" indent="0">
@@ -8023,7 +8065,7 @@
               </a:lnSpc>
               <a:buNone/>
             </a:pPr>
-            <a:endParaRPr lang="en-US" sz="1300" dirty="0"/>
+            <a:endParaRPr lang="en-US" sz="1400" dirty="0"/>
           </a:p>
           <a:p>
             <a:pPr marL="0" indent="0">
@@ -8033,7 +8075,7 @@
               <a:buNone/>
             </a:pPr>
             <a:r>
-              <a:rPr lang="en-US" sz="1300" b="1" dirty="0">
+              <a:rPr lang="en-US" sz="1400" b="1" dirty="0">
                 <a:solidFill>
                   <a:srgbClr val="CADCFC"/>
                 </a:solidFill>
@@ -8043,7 +8085,7 @@
               </a:rPr>
               <a:t>class Cat:</a:t>
             </a:r>
-            <a:endParaRPr lang="en-US" sz="1300" dirty="0"/>
+            <a:endParaRPr lang="en-US" sz="1400" dirty="0"/>
           </a:p>
           <a:p>
             <a:pPr marL="0" indent="0">
@@ -8053,7 +8095,7 @@
               <a:buNone/>
             </a:pPr>
             <a:r>
-              <a:rPr lang="en-US" sz="1300" dirty="0">
+              <a:rPr lang="en-US" sz="1400" dirty="0">
                 <a:solidFill>
                   <a:srgbClr val="CADCFC"/>
                 </a:solidFill>
@@ -8063,7 +8105,7 @@
               </a:rPr>
               <a:t>    def speak(self):</a:t>
             </a:r>
-            <a:endParaRPr lang="en-US" sz="1300" dirty="0"/>
+            <a:endParaRPr lang="en-US" sz="1400" dirty="0"/>
           </a:p>
           <a:p>
             <a:pPr marL="0" indent="0">
@@ -8073,7 +8115,7 @@
               <a:buNone/>
             </a:pPr>
             <a:r>
-              <a:rPr lang="en-US" sz="1300" dirty="0">
+              <a:rPr lang="en-US" sz="1400" dirty="0">
                 <a:solidFill>
                   <a:srgbClr val="02C39A"/>
                 </a:solidFill>
@@ -8083,7 +8125,7 @@
               </a:rPr>
               <a:t>        return "Няв!"</a:t>
             </a:r>
-            <a:endParaRPr lang="en-US" sz="1300" dirty="0"/>
+            <a:endParaRPr lang="en-US" sz="1400" dirty="0"/>
           </a:p>
           <a:p>
             <a:pPr marL="0" indent="0">
@@ -8092,7 +8134,7 @@
               </a:lnSpc>
               <a:buNone/>
             </a:pPr>
-            <a:endParaRPr lang="en-US" sz="1300" dirty="0"/>
+            <a:endParaRPr lang="en-US" sz="1400" dirty="0"/>
           </a:p>
           <a:p>
             <a:pPr marL="0" indent="0">
@@ -8102,7 +8144,7 @@
               <a:buNone/>
             </a:pPr>
             <a:r>
-              <a:rPr lang="en-US" sz="1300" dirty="0">
+              <a:rPr lang="en-US" sz="1400" dirty="0">
                 <a:solidFill>
                   <a:srgbClr val="CADCFC"/>
                 </a:solidFill>
@@ -8112,7 +8154,7 @@
               </a:rPr>
               <a:t>for animal in [Dog(), Cat()]:</a:t>
             </a:r>
-            <a:endParaRPr lang="en-US" sz="1300" dirty="0"/>
+            <a:endParaRPr lang="en-US" sz="1400" dirty="0"/>
           </a:p>
           <a:p>
             <a:pPr marL="0" indent="0">
@@ -8122,7 +8164,7 @@
               <a:buNone/>
             </a:pPr>
             <a:r>
-              <a:rPr lang="en-US" sz="1300" dirty="0">
+              <a:rPr lang="en-US" sz="1400" dirty="0">
                 <a:solidFill>
                   <a:srgbClr val="CADCFC"/>
                 </a:solidFill>
@@ -8132,7 +8174,7 @@
               </a:rPr>
               <a:t>    print(animal.speak())</a:t>
             </a:r>
-            <a:endParaRPr lang="en-US" sz="1300" dirty="0"/>
+            <a:endParaRPr lang="en-US" sz="1400" dirty="0"/>
           </a:p>
           <a:p>
             <a:pPr marL="0" indent="0">
@@ -8142,7 +8184,7 @@
               <a:buNone/>
             </a:pPr>
             <a:r>
-              <a:rPr lang="en-US" sz="1300" dirty="0">
+              <a:rPr lang="en-US" sz="1400" dirty="0">
                 <a:solidFill>
                   <a:srgbClr val="6B78A8"/>
                 </a:solidFill>
@@ -8152,7 +8194,7 @@
               </a:rPr>
               <a:t># Гав!</a:t>
             </a:r>
-            <a:endParaRPr lang="en-US" sz="1300" dirty="0"/>
+            <a:endParaRPr lang="en-US" sz="1400" dirty="0"/>
           </a:p>
           <a:p>
             <a:pPr marL="0" indent="0">
@@ -8162,7 +8204,7 @@
               <a:buNone/>
             </a:pPr>
             <a:r>
-              <a:rPr lang="en-US" sz="1300" dirty="0">
+              <a:rPr lang="en-US" sz="1400" dirty="0">
                 <a:solidFill>
                   <a:srgbClr val="6B78A8"/>
                 </a:solidFill>
@@ -8172,7 +8214,7 @@
               </a:rPr>
               <a:t># Няв!</a:t>
             </a:r>
-            <a:endParaRPr lang="en-US" sz="1300" dirty="0"/>
+            <a:endParaRPr lang="en-US" sz="1400" dirty="0"/>
           </a:p>
         </p:txBody>
       </p:sp>
@@ -8184,7 +8226,7 @@
         </p:nvSpPr>
         <p:spPr>
           <a:xfrm>
-            <a:off x="7863840" y="2377440"/>
+            <a:off x="7950757" y="2377440"/>
             <a:ext cx="1463040" cy="1463040"/>
           </a:xfrm>
           <a:prstGeom prst="ellipse">
@@ -8221,7 +8263,7 @@
         </p:blipFill>
         <p:spPr>
           <a:xfrm>
-            <a:off x="7995514" y="2509114"/>
+            <a:off x="8082431" y="2509114"/>
             <a:ext cx="1199693" cy="1199693"/>
           </a:xfrm>
           <a:prstGeom prst="rect">
@@ -8238,7 +8280,7 @@
         <p:spPr>
           <a:xfrm>
             <a:off x="6492240" y="4023360"/>
-            <a:ext cx="4206240" cy="1005840"/>
+            <a:ext cx="4380076" cy="1005840"/>
           </a:xfrm>
           <a:prstGeom prst="rect">
             <a:avLst/>
@@ -8257,7 +8299,7 @@
               <a:buNone/>
             </a:pPr>
             <a:r>
-              <a:rPr lang="en-US" sz="1300" i="1" dirty="0">
+              <a:rPr lang="en-US" sz="1600" i="1" dirty="0">
                 <a:solidFill>
                   <a:srgbClr val="6B78A8"/>
                 </a:solidFill>
@@ -8267,7 +8309,7 @@
               </a:rPr>
               <a:t>"Багато форм" — той самий виклик .speak(),</a:t>
             </a:r>
-            <a:endParaRPr lang="en-US" sz="1300" dirty="0"/>
+            <a:endParaRPr lang="en-US" sz="1600" dirty="0"/>
           </a:p>
           <a:p>
             <a:pPr marL="0" indent="0" algn="ctr">
@@ -8277,7 +8319,7 @@
               <a:buNone/>
             </a:pPr>
             <a:r>
-              <a:rPr lang="en-US" sz="1300" i="1" dirty="0">
+              <a:rPr lang="en-US" sz="1600" i="1" dirty="0">
                 <a:solidFill>
                   <a:srgbClr val="6B78A8"/>
                 </a:solidFill>
@@ -8287,7 +8329,7 @@
               </a:rPr>
               <a:t>а результат залежить від того, хто саме відповідає</a:t>
             </a:r>
-            <a:endParaRPr lang="en-US" sz="1300" dirty="0"/>
+            <a:endParaRPr lang="en-US" sz="1600" dirty="0"/>
           </a:p>
         </p:txBody>
       </p:sp>
@@ -8299,8 +8341,8 @@
         </p:nvSpPr>
         <p:spPr>
           <a:xfrm>
-            <a:off x="6492240" y="5212080"/>
-            <a:ext cx="4206240" cy="822960"/>
+            <a:off x="6539929" y="5212080"/>
+            <a:ext cx="4158551" cy="822960"/>
           </a:xfrm>
           <a:prstGeom prst="rect">
             <a:avLst/>
@@ -8319,7 +8361,7 @@
               <a:buNone/>
             </a:pPr>
             <a:r>
-              <a:rPr lang="en-US" sz="1250" dirty="0">
+              <a:rPr lang="en-US" sz="1400" dirty="0">
                 <a:solidFill>
                   <a:srgbClr val="3C4570"/>
                 </a:solidFill>
@@ -8329,7 +8371,7 @@
               </a:rPr>
               <a:t>Python навіть не питає, Dog це чи Cat — просто викликає .speak() на кожному об'єкті.</a:t>
             </a:r>
-            <a:endParaRPr lang="en-US" sz="1250" dirty="0"/>
+            <a:endParaRPr lang="en-US" sz="1400" dirty="0"/>
           </a:p>
         </p:txBody>
       </p:sp>
@@ -8469,7 +8511,7 @@
               <a:buNone/>
             </a:pPr>
             <a:r>
-              <a:rPr lang="en-US" sz="1400" i="1" dirty="0">
+              <a:rPr lang="en-US" sz="1600" i="1" dirty="0">
                 <a:solidFill>
                   <a:srgbClr val="CADCFC"/>
                 </a:solidFill>
@@ -8479,7 +8521,7 @@
               </a:rPr>
               <a:t>Нащадок може замінити метод батька власною версією — це override</a:t>
             </a:r>
-            <a:endParaRPr lang="en-US" sz="1400" dirty="0"/>
+            <a:endParaRPr lang="en-US" sz="1600" dirty="0"/>
           </a:p>
         </p:txBody>
       </p:sp>
@@ -8547,7 +8589,7 @@
               <a:buNone/>
             </a:pPr>
             <a:r>
-              <a:rPr lang="en-US" sz="1250" b="1" dirty="0">
+              <a:rPr lang="en-US" sz="1400" b="1" dirty="0">
                 <a:solidFill>
                   <a:srgbClr val="CADCFC"/>
                 </a:solidFill>
@@ -8557,7 +8599,7 @@
               </a:rPr>
               <a:t>class Person:</a:t>
             </a:r>
-            <a:endParaRPr lang="en-US" sz="1250" dirty="0"/>
+            <a:endParaRPr lang="en-US" sz="1400" dirty="0"/>
           </a:p>
           <a:p>
             <a:pPr marL="0" indent="0">
@@ -8567,7 +8609,7 @@
               <a:buNone/>
             </a:pPr>
             <a:r>
-              <a:rPr lang="en-US" sz="1250" dirty="0">
+              <a:rPr lang="en-US" sz="1400" dirty="0">
                 <a:solidFill>
                   <a:srgbClr val="CADCFC"/>
                 </a:solidFill>
@@ -8577,7 +8619,7 @@
               </a:rPr>
               <a:t>    def describe(self):</a:t>
             </a:r>
-            <a:endParaRPr lang="en-US" sz="1250" dirty="0"/>
+            <a:endParaRPr lang="en-US" sz="1400" dirty="0"/>
           </a:p>
           <a:p>
             <a:pPr marL="0" indent="0">
@@ -8587,7 +8629,7 @@
               <a:buNone/>
             </a:pPr>
             <a:r>
-              <a:rPr lang="en-US" sz="1250" dirty="0">
+              <a:rPr lang="en-US" sz="1400" dirty="0">
                 <a:solidFill>
                   <a:srgbClr val="02C39A"/>
                 </a:solidFill>
@@ -8597,7 +8639,7 @@
               </a:rPr>
               <a:t>        return f"Я {self.name}"</a:t>
             </a:r>
-            <a:endParaRPr lang="en-US" sz="1250" dirty="0"/>
+            <a:endParaRPr lang="en-US" sz="1400" dirty="0"/>
           </a:p>
           <a:p>
             <a:pPr marL="0" indent="0">
@@ -8606,7 +8648,7 @@
               </a:lnSpc>
               <a:buNone/>
             </a:pPr>
-            <a:endParaRPr lang="en-US" sz="1250" dirty="0"/>
+            <a:endParaRPr lang="en-US" sz="1400" dirty="0"/>
           </a:p>
           <a:p>
             <a:pPr marL="0" indent="0">
@@ -8616,7 +8658,7 @@
               <a:buNone/>
             </a:pPr>
             <a:r>
-              <a:rPr lang="en-US" sz="1250" b="1" dirty="0">
+              <a:rPr lang="en-US" sz="1400" b="1" dirty="0">
                 <a:solidFill>
                   <a:srgbClr val="CADCFC"/>
                 </a:solidFill>
@@ -8626,7 +8668,7 @@
               </a:rPr>
               <a:t>class Teacher(Person):</a:t>
             </a:r>
-            <a:endParaRPr lang="en-US" sz="1250" dirty="0"/>
+            <a:endParaRPr lang="en-US" sz="1400" dirty="0"/>
           </a:p>
           <a:p>
             <a:pPr marL="0" indent="0">
@@ -8636,7 +8678,7 @@
               <a:buNone/>
             </a:pPr>
             <a:r>
-              <a:rPr lang="en-US" sz="1250" b="1" dirty="0">
+              <a:rPr lang="en-US" sz="1400" b="1" dirty="0">
                 <a:solidFill>
                   <a:srgbClr val="02C39A"/>
                 </a:solidFill>
@@ -8646,7 +8688,7 @@
               </a:rPr>
               <a:t>    def describe(self):        # перевизначення!</a:t>
             </a:r>
-            <a:endParaRPr lang="en-US" sz="1250" dirty="0"/>
+            <a:endParaRPr lang="en-US" sz="1400" dirty="0"/>
           </a:p>
           <a:p>
             <a:pPr marL="0" indent="0">
@@ -8656,7 +8698,7 @@
               <a:buNone/>
             </a:pPr>
             <a:r>
-              <a:rPr lang="en-US" sz="1250" dirty="0">
+              <a:rPr lang="en-US" sz="1400" dirty="0">
                 <a:solidFill>
                   <a:srgbClr val="02C39A"/>
                 </a:solidFill>
@@ -8666,7 +8708,7 @@
               </a:rPr>
               <a:t>        return f"Я вчитель {self.name} ({self.subject})"</a:t>
             </a:r>
-            <a:endParaRPr lang="en-US" sz="1250" dirty="0"/>
+            <a:endParaRPr lang="en-US" sz="1400" dirty="0"/>
           </a:p>
           <a:p>
             <a:pPr marL="0" indent="0">
@@ -8675,7 +8717,7 @@
               </a:lnSpc>
               <a:buNone/>
             </a:pPr>
-            <a:endParaRPr lang="en-US" sz="1250" dirty="0"/>
+            <a:endParaRPr lang="en-US" sz="1400" dirty="0"/>
           </a:p>
           <a:p>
             <a:pPr marL="0" indent="0">
@@ -8685,7 +8727,7 @@
               <a:buNone/>
             </a:pPr>
             <a:r>
-              <a:rPr lang="en-US" sz="1250" dirty="0">
+              <a:rPr lang="en-US" sz="1400" dirty="0">
                 <a:solidFill>
                   <a:srgbClr val="CADCFC"/>
                 </a:solidFill>
@@ -8695,7 +8737,7 @@
               </a:rPr>
               <a:t>people = [Person("Іван"), Teacher("Ірина", "Python")]</a:t>
             </a:r>
-            <a:endParaRPr lang="en-US" sz="1250" dirty="0"/>
+            <a:endParaRPr lang="en-US" sz="1400" dirty="0"/>
           </a:p>
           <a:p>
             <a:pPr marL="0" indent="0">
@@ -8705,7 +8747,7 @@
               <a:buNone/>
             </a:pPr>
             <a:r>
-              <a:rPr lang="en-US" sz="1250" dirty="0">
+              <a:rPr lang="en-US" sz="1400" dirty="0">
                 <a:solidFill>
                   <a:srgbClr val="CADCFC"/>
                 </a:solidFill>
@@ -8715,7 +8757,7 @@
               </a:rPr>
               <a:t>for p in people:</a:t>
             </a:r>
-            <a:endParaRPr lang="en-US" sz="1250" dirty="0"/>
+            <a:endParaRPr lang="en-US" sz="1400" dirty="0"/>
           </a:p>
           <a:p>
             <a:pPr marL="0" indent="0">
@@ -8725,7 +8767,7 @@
               <a:buNone/>
             </a:pPr>
             <a:r>
-              <a:rPr lang="en-US" sz="1250" dirty="0">
+              <a:rPr lang="en-US" sz="1400" dirty="0">
                 <a:solidFill>
                   <a:srgbClr val="CADCFC"/>
                 </a:solidFill>
@@ -8735,7 +8777,7 @@
               </a:rPr>
               <a:t>    print(p.describe())    # у кожного своя відповідь</a:t>
             </a:r>
-            <a:endParaRPr lang="en-US" sz="1250" dirty="0"/>
+            <a:endParaRPr lang="en-US" sz="1400" dirty="0"/>
           </a:p>
         </p:txBody>
       </p:sp>
@@ -8818,7 +8860,7 @@
               <a:buNone/>
             </a:pPr>
             <a:r>
-              <a:rPr lang="en-US" sz="1250" dirty="0">
+              <a:rPr lang="en-US" sz="1400" dirty="0">
                 <a:solidFill>
                   <a:srgbClr val="CADCFC"/>
                 </a:solidFill>
@@ -8828,7 +8870,7 @@
               </a:rPr>
               <a:t>p.describe() виглядає однаково для всіх, але Python бере метод саме того класу, яким є об'єкт.</a:t>
             </a:r>
-            <a:endParaRPr lang="en-US" sz="1250" dirty="0"/>
+            <a:endParaRPr lang="en-US" sz="1400" dirty="0"/>
           </a:p>
         </p:txBody>
       </p:sp>
@@ -8911,7 +8953,7 @@
               <a:buNone/>
             </a:pPr>
             <a:r>
-              <a:rPr lang="en-US" sz="1250" dirty="0">
+              <a:rPr lang="en-US" sz="1400" dirty="0">
                 <a:solidFill>
                   <a:srgbClr val="CADCFC"/>
                 </a:solidFill>
@@ -8921,7 +8963,7 @@
               </a:rPr>
               <a:t>У Teacher описаний власний describe() — він "перекриває" версію з Person.</a:t>
             </a:r>
-            <a:endParaRPr lang="en-US" sz="1250" dirty="0"/>
+            <a:endParaRPr lang="en-US" sz="1400" dirty="0"/>
           </a:p>
         </p:txBody>
       </p:sp>
@@ -9004,7 +9046,7 @@
               <a:buNone/>
             </a:pPr>
             <a:r>
-              <a:rPr lang="en-US" sz="1250" dirty="0">
+              <a:rPr lang="en-US" sz="1400" dirty="0">
                 <a:solidFill>
                   <a:srgbClr val="CADCFC"/>
                 </a:solidFill>
@@ -9014,7 +9056,7 @@
               </a:rPr>
               <a:t>Це і є поліморфізм: однаковий виклик → різний результат залежно від типу об'єкта.</a:t>
             </a:r>
-            <a:endParaRPr lang="en-US" sz="1250" dirty="0"/>
+            <a:endParaRPr lang="en-US" sz="1400" dirty="0"/>
           </a:p>
         </p:txBody>
       </p:sp>
